--- a/uji-jarak.pptx
+++ b/uji-jarak.pptx
@@ -1299,7 +1299,7 @@
                 <a:ea typeface="Aptos" pitchFamily="34" charset="-122"/>
                 <a:cs typeface="Aptos" pitchFamily="34" charset="-120"/>
               </a:rPr>
-              <a:t>Minggu ke-4 September 2026</a:t>
+              <a:t>Minggu Ke-4 September 2026</a:t>
             </a:r>
             <a:endParaRPr lang="en-US" sz="1800" dirty="0"/>
           </a:p>
@@ -1611,7 +1611,7 @@
                 <a:ea typeface="Aptos" pitchFamily="34" charset="-122"/>
                 <a:cs typeface="Aptos" pitchFamily="34" charset="-120"/>
               </a:rPr>
-              <a:t>: Minggu ke-4 September 2026</a:t>
+              <a:t>: Minggu Ke-4 September 2026</a:t>
             </a:r>
             <a:endParaRPr lang="en-US" sz="1400" dirty="0"/>
           </a:p>
@@ -2688,7 +2688,7 @@
                 <a:ea typeface="Aptos" pitchFamily="34" charset="-122"/>
                 <a:cs typeface="Aptos" pitchFamily="34" charset="-120"/>
               </a:rPr>
-              <a:t>MARINA K.</a:t>
+              <a:t>Marina K.</a:t>
             </a:r>
             <a:endParaRPr lang="en-US" sz="1600" dirty="0"/>
           </a:p>
@@ -4096,7 +4096,7 @@
                 <a:ea typeface="Aptos" pitchFamily="34" charset="-122"/>
                 <a:cs typeface="Aptos" pitchFamily="34" charset="-120"/>
               </a:rPr>
-              <a:t>HUSNIA P.</a:t>
+              <a:t>Husnia P.</a:t>
             </a:r>
             <a:endParaRPr lang="en-US" sz="1600" dirty="0"/>
           </a:p>

--- a/uji-jarak.pptx
+++ b/uji-jarak.pptx
@@ -2688,7 +2688,7 @@
                 <a:ea typeface="Aptos" pitchFamily="34" charset="-122"/>
                 <a:cs typeface="Aptos" pitchFamily="34" charset="-120"/>
               </a:rPr>
-              <a:t>Marina K.</a:t>
+              <a:t>Marina Kadir</a:t>
             </a:r>
             <a:endParaRPr lang="en-US" sz="1600" dirty="0"/>
           </a:p>
@@ -4096,7 +4096,7 @@
                 <a:ea typeface="Aptos" pitchFamily="34" charset="-122"/>
                 <a:cs typeface="Aptos" pitchFamily="34" charset="-120"/>
               </a:rPr>
-              <a:t>Husnia P.</a:t>
+              <a:t>Husnia Paraditha</a:t>
             </a:r>
             <a:endParaRPr lang="en-US" sz="1600" dirty="0"/>
           </a:p>
@@ -4626,7 +4626,7 @@
                 <a:ea typeface="Aptos" pitchFamily="34" charset="-122"/>
                 <a:cs typeface="Aptos" pitchFamily="34" charset="-120"/>
               </a:rPr>
-              <a:t>Irwan A.</a:t>
+              <a:t>Irwan Allo</a:t>
             </a:r>
             <a:endParaRPr lang="en-US" sz="1600" dirty="0"/>
           </a:p>

--- a/uji-jarak.pptx
+++ b/uji-jarak.pptx
@@ -2556,7 +2556,7 @@
         </p:nvSpPr>
         <p:spPr>
           <a:xfrm>
-            <a:off x="4194442" y="2020824"/>
+            <a:off x="4101173" y="2020824"/>
             <a:ext cx="9144" cy="548640"/>
           </a:xfrm>
           <a:prstGeom prst="rect">
@@ -2663,7 +2663,7 @@
         </p:nvSpPr>
         <p:spPr>
           <a:xfrm>
-            <a:off x="2667394" y="1975104"/>
+            <a:off x="2574125" y="1975104"/>
             <a:ext cx="1481328" cy="788213"/>
           </a:xfrm>
           <a:prstGeom prst="rect">
@@ -3964,7 +3964,7 @@
         </p:nvSpPr>
         <p:spPr>
           <a:xfrm>
-            <a:off x="4194442" y="2020824"/>
+            <a:off x="4101173" y="2020824"/>
             <a:ext cx="9144" cy="1382573"/>
           </a:xfrm>
           <a:prstGeom prst="rect">
@@ -4071,7 +4071,7 @@
         </p:nvSpPr>
         <p:spPr>
           <a:xfrm>
-            <a:off x="2667394" y="1975104"/>
+            <a:off x="2574125" y="1975104"/>
             <a:ext cx="1481328" cy="788213"/>
           </a:xfrm>
           <a:prstGeom prst="rect">
@@ -4601,7 +4601,7 @@
         </p:nvSpPr>
         <p:spPr>
           <a:xfrm>
-            <a:off x="2667394" y="2854757"/>
+            <a:off x="2574125" y="2854757"/>
             <a:ext cx="1481328" cy="788213"/>
           </a:xfrm>
           <a:prstGeom prst="rect">

--- a/uji-jarak.pptx
+++ b/uji-jarak.pptx
@@ -4096,7 +4096,7 @@
                 <a:ea typeface="Aptos" pitchFamily="34" charset="-122"/>
                 <a:cs typeface="Aptos" pitchFamily="34" charset="-120"/>
               </a:rPr>
-              <a:t>Husnia Paraditha</a:t>
+              <a:t>Husnia P.</a:t>
             </a:r>
             <a:endParaRPr lang="en-US" sz="1600" dirty="0"/>
           </a:p>
